--- a/talk/deck/congress/Fridman_WSC2026_open_science.pptx
+++ b/talk/deck/congress/Fridman_WSC2026_open_science.pptx
@@ -1264,7 +1264,7 @@
           <a:lstStyle/>
           <a:p>
             <a:r>
-              <a:t>Required by the congress. Tick one box by typing an x in the blue cell, and list any company in the table. The congress's published faculty disclosure list shows Speakers Bureau, Regeneron/Bayer, under Other; confirm it, or ask wsc@kenes.com to correct it.</a:t>
+              <a:t>Nothing to disclose. Required by the congress; leave it up for a second and move on.</a:t>
             </a:r>
           </a:p>
         </p:txBody>
@@ -9990,11 +9990,11 @@
                       <a:r>
                         <a:rPr sz="1500" i="0" b="0">
                           <a:solidFill>
-                            <a:srgbClr val="000000"/>
+                            <a:srgbClr val="FFFFFF"/>
                           </a:solidFill>
                           <a:latin typeface="Arial"/>
                         </a:rPr>
-                        <a:t/>
+                        <a:t>x</a:t>
                       </a:r>
                     </a:p>
                   </a:txBody>
@@ -10078,7 +10078,7 @@
                       <a:r>
                         <a:rPr sz="1500" i="0" b="0">
                           <a:solidFill>
-                            <a:srgbClr val="000000"/>
+                            <a:srgbClr val="FFFFFF"/>
                           </a:solidFill>
                           <a:latin typeface="Arial"/>
                         </a:rPr>

--- a/talk/deck/congress/Fridman_WSC2026_open_science.pptx
+++ b/talk/deck/congress/Fridman_WSC2026_open_science.pptx
@@ -941,7 +941,7 @@
           <a:lstStyle/>
           <a:p>
             <a:r>
-              <a:t>Forty-five seconds. The index is the mean, over three full-text signals (data deposited or public source, GitHub, trial registration), of an institution's rate divided by the stroke rate; 1 = stroke average. Shown: the top of the 60 institutions with the most audited articles (82 or more each), as on the dashboard. Small counts are a hint, not a ranking. Journals: among the 40 largest on the dashboard, the Journal of Cerebral Blood Flow and Metabolism leads (2.7x) and Stroke is fourth (1.5x); among smaller journals with at least 30 audited articles, Nature Communications, Brain Communications and PeerJ lead. The point: the measurement exists, is cheap, and is what a prize would recognise.</a:t>
+              <a:t>Forty-five seconds. The index is the mean, over three full-text signals (data deposited or public source, GitHub, trial registration), of an institution's rate divided by the stroke rate; 1 = stroke average. Shown: the top of the 60 institutions with the most audited articles (82 or more each), as on the dashboard. Charité is counted once: OpenAlex lists its Center for Stroke Research Berlin and the Berlin Institute of Health separately, and those are merged into it (133 audited articles; deposit or public source 9.8%, GitHub 10.5%, trial registration 37%). Small counts are a hint, not a ranking. Journals: among the 40 largest on the dashboard, the Journal of Cerebral Blood Flow and Metabolism leads (2.7x) and Stroke is fourth (1.5x); among smaller journals with at least 30 audited articles, Nature Communications, Brain Communications and PeerJ lead. The point: the measurement exists, is cheap, and is what a prize would recognise.</a:t>
             </a:r>
           </a:p>
         </p:txBody>
@@ -12459,8 +12459,8 @@
         </p:nvSpPr>
         <p:spPr>
           <a:xfrm>
-            <a:off x="3981450" y="1809155"/>
-            <a:ext cx="714375" cy="190500"/>
+            <a:off x="3981450" y="1818680"/>
+            <a:ext cx="714375" cy="161925"/>
           </a:xfrm>
           <a:prstGeom prst="rect">
             <a:avLst/>
@@ -12503,8 +12503,8 @@
         </p:nvSpPr>
         <p:spPr>
           <a:xfrm>
-            <a:off x="4695825" y="1809155"/>
-            <a:ext cx="3000375" cy="190500"/>
+            <a:off x="4695825" y="1818680"/>
+            <a:ext cx="2428875" cy="161925"/>
           </a:xfrm>
           <a:prstGeom prst="rect">
             <a:avLst/>
@@ -12547,8 +12547,8 @@
         </p:nvSpPr>
         <p:spPr>
           <a:xfrm>
-            <a:off x="3981450" y="2104430"/>
-            <a:ext cx="714375" cy="190500"/>
+            <a:off x="3981450" y="2075855"/>
+            <a:ext cx="714375" cy="161925"/>
           </a:xfrm>
           <a:prstGeom prst="rect">
             <a:avLst/>
@@ -12591,8 +12591,8 @@
         </p:nvSpPr>
         <p:spPr>
           <a:xfrm>
-            <a:off x="4695825" y="2104430"/>
-            <a:ext cx="2428875" cy="190500"/>
+            <a:off x="4695825" y="2075855"/>
+            <a:ext cx="1357312" cy="161925"/>
           </a:xfrm>
           <a:prstGeom prst="rect">
             <a:avLst/>
@@ -12635,8 +12635,8 @@
         </p:nvSpPr>
         <p:spPr>
           <a:xfrm>
-            <a:off x="3981450" y="2399705"/>
-            <a:ext cx="714375" cy="190500"/>
+            <a:off x="3981450" y="2333030"/>
+            <a:ext cx="714375" cy="161925"/>
           </a:xfrm>
           <a:prstGeom prst="rect">
             <a:avLst/>
@@ -12679,8 +12679,8 @@
         </p:nvSpPr>
         <p:spPr>
           <a:xfrm>
-            <a:off x="4695825" y="2399705"/>
-            <a:ext cx="1357312" cy="190500"/>
+            <a:off x="4695825" y="2333030"/>
+            <a:ext cx="1143000" cy="161925"/>
           </a:xfrm>
           <a:prstGeom prst="rect">
             <a:avLst/>
@@ -12723,8 +12723,8 @@
         </p:nvSpPr>
         <p:spPr>
           <a:xfrm>
-            <a:off x="3981450" y="2694980"/>
-            <a:ext cx="714375" cy="190500"/>
+            <a:off x="3981450" y="2590205"/>
+            <a:ext cx="714375" cy="161925"/>
           </a:xfrm>
           <a:prstGeom prst="rect">
             <a:avLst/>
@@ -12767,8 +12767,8 @@
         </p:nvSpPr>
         <p:spPr>
           <a:xfrm>
-            <a:off x="4695825" y="2694980"/>
-            <a:ext cx="1143000" cy="190500"/>
+            <a:off x="4695825" y="2590205"/>
+            <a:ext cx="1071562" cy="161925"/>
           </a:xfrm>
           <a:prstGeom prst="rect">
             <a:avLst/>
@@ -12811,8 +12811,8 @@
         </p:nvSpPr>
         <p:spPr>
           <a:xfrm>
-            <a:off x="3981450" y="2990255"/>
-            <a:ext cx="714375" cy="190500"/>
+            <a:off x="3981450" y="2847380"/>
+            <a:ext cx="714375" cy="161925"/>
           </a:xfrm>
           <a:prstGeom prst="rect">
             <a:avLst/>
@@ -12855,8 +12855,8 @@
         </p:nvSpPr>
         <p:spPr>
           <a:xfrm>
-            <a:off x="4695825" y="2990255"/>
-            <a:ext cx="1071562" cy="190500"/>
+            <a:off x="4695825" y="2847380"/>
+            <a:ext cx="928688" cy="161925"/>
           </a:xfrm>
           <a:prstGeom prst="rect">
             <a:avLst/>
@@ -12899,8 +12899,8 @@
         </p:nvSpPr>
         <p:spPr>
           <a:xfrm>
-            <a:off x="3981450" y="3285530"/>
-            <a:ext cx="714375" cy="190500"/>
+            <a:off x="3981450" y="3104555"/>
+            <a:ext cx="714375" cy="161925"/>
           </a:xfrm>
           <a:prstGeom prst="rect">
             <a:avLst/>
@@ -12943,8 +12943,8 @@
         </p:nvSpPr>
         <p:spPr>
           <a:xfrm>
-            <a:off x="4695825" y="3285530"/>
-            <a:ext cx="928688" cy="190500"/>
+            <a:off x="4695825" y="3104555"/>
+            <a:ext cx="857250" cy="161925"/>
           </a:xfrm>
           <a:prstGeom prst="rect">
             <a:avLst/>
@@ -12981,7 +12981,183 @@
       </p:sp>
       <p:sp>
         <p:nvSpPr>
-          <p:cNvPr id="17" name="TextBox 16"/>
+          <p:cNvPr id="17" name="Rectangle 16"/>
+          <p:cNvSpPr/>
+          <p:nvPr/>
+        </p:nvSpPr>
+        <p:spPr>
+          <a:xfrm>
+            <a:off x="3981450" y="3361730"/>
+            <a:ext cx="714375" cy="161925"/>
+          </a:xfrm>
+          <a:prstGeom prst="rect">
+            <a:avLst/>
+          </a:prstGeom>
+          <a:solidFill>
+            <a:srgbClr val="C8C8C4"/>
+          </a:solidFill>
+          <a:ln>
+            <a:noFill/>
+          </a:ln>
+          <a:effectLst/>
+        </p:spPr>
+        <p:style>
+          <a:lnRef idx="1">
+            <a:schemeClr val="accent1"/>
+          </a:lnRef>
+          <a:fillRef idx="3">
+            <a:schemeClr val="accent1"/>
+          </a:fillRef>
+          <a:effectRef idx="2">
+            <a:schemeClr val="accent1"/>
+          </a:effectRef>
+          <a:fontRef idx="minor">
+            <a:schemeClr val="lt1"/>
+          </a:fontRef>
+        </p:style>
+        <p:txBody>
+          <a:bodyPr rtlCol="0" anchor="ctr"/>
+          <a:lstStyle/>
+          <a:p>
+            <a:pPr algn="ctr"/>
+          </a:p>
+        </p:txBody>
+      </p:sp>
+      <p:sp>
+        <p:nvSpPr>
+          <p:cNvPr id="18" name="Rectangle 17"/>
+          <p:cNvSpPr/>
+          <p:nvPr/>
+        </p:nvSpPr>
+        <p:spPr>
+          <a:xfrm>
+            <a:off x="4695825" y="3361730"/>
+            <a:ext cx="857250" cy="161925"/>
+          </a:xfrm>
+          <a:prstGeom prst="rect">
+            <a:avLst/>
+          </a:prstGeom>
+          <a:solidFill>
+            <a:srgbClr val="D7263D"/>
+          </a:solidFill>
+          <a:ln>
+            <a:noFill/>
+          </a:ln>
+          <a:effectLst/>
+        </p:spPr>
+        <p:style>
+          <a:lnRef idx="1">
+            <a:schemeClr val="accent1"/>
+          </a:lnRef>
+          <a:fillRef idx="3">
+            <a:schemeClr val="accent1"/>
+          </a:fillRef>
+          <a:effectRef idx="2">
+            <a:schemeClr val="accent1"/>
+          </a:effectRef>
+          <a:fontRef idx="minor">
+            <a:schemeClr val="lt1"/>
+          </a:fontRef>
+        </p:style>
+        <p:txBody>
+          <a:bodyPr rtlCol="0" anchor="ctr"/>
+          <a:lstStyle/>
+          <a:p>
+            <a:pPr algn="ctr"/>
+          </a:p>
+        </p:txBody>
+      </p:sp>
+      <p:sp>
+        <p:nvSpPr>
+          <p:cNvPr id="19" name="Rectangle 18"/>
+          <p:cNvSpPr/>
+          <p:nvPr/>
+        </p:nvSpPr>
+        <p:spPr>
+          <a:xfrm>
+            <a:off x="3981450" y="3618905"/>
+            <a:ext cx="714375" cy="161925"/>
+          </a:xfrm>
+          <a:prstGeom prst="rect">
+            <a:avLst/>
+          </a:prstGeom>
+          <a:solidFill>
+            <a:srgbClr val="C8C8C4"/>
+          </a:solidFill>
+          <a:ln>
+            <a:noFill/>
+          </a:ln>
+          <a:effectLst/>
+        </p:spPr>
+        <p:style>
+          <a:lnRef idx="1">
+            <a:schemeClr val="accent1"/>
+          </a:lnRef>
+          <a:fillRef idx="3">
+            <a:schemeClr val="accent1"/>
+          </a:fillRef>
+          <a:effectRef idx="2">
+            <a:schemeClr val="accent1"/>
+          </a:effectRef>
+          <a:fontRef idx="minor">
+            <a:schemeClr val="lt1"/>
+          </a:fontRef>
+        </p:style>
+        <p:txBody>
+          <a:bodyPr rtlCol="0" anchor="ctr"/>
+          <a:lstStyle/>
+          <a:p>
+            <a:pPr algn="ctr"/>
+          </a:p>
+        </p:txBody>
+      </p:sp>
+      <p:sp>
+        <p:nvSpPr>
+          <p:cNvPr id="20" name="Rectangle 19"/>
+          <p:cNvSpPr/>
+          <p:nvPr/>
+        </p:nvSpPr>
+        <p:spPr>
+          <a:xfrm>
+            <a:off x="4695825" y="3618905"/>
+            <a:ext cx="785812" cy="161925"/>
+          </a:xfrm>
+          <a:prstGeom prst="rect">
+            <a:avLst/>
+          </a:prstGeom>
+          <a:solidFill>
+            <a:srgbClr val="D7263D"/>
+          </a:solidFill>
+          <a:ln>
+            <a:noFill/>
+          </a:ln>
+          <a:effectLst/>
+        </p:spPr>
+        <p:style>
+          <a:lnRef idx="1">
+            <a:schemeClr val="accent1"/>
+          </a:lnRef>
+          <a:fillRef idx="3">
+            <a:schemeClr val="accent1"/>
+          </a:fillRef>
+          <a:effectRef idx="2">
+            <a:schemeClr val="accent1"/>
+          </a:effectRef>
+          <a:fontRef idx="minor">
+            <a:schemeClr val="lt1"/>
+          </a:fontRef>
+        </p:style>
+        <p:txBody>
+          <a:bodyPr rtlCol="0" anchor="ctr"/>
+          <a:lstStyle/>
+          <a:p>
+            <a:pPr algn="ctr"/>
+          </a:p>
+        </p:txBody>
+      </p:sp>
+      <p:sp>
+        <p:nvSpPr>
+          <p:cNvPr id="21" name="TextBox 20"/>
           <p:cNvSpPr txBox="1"/>
           <p:nvPr/>
         </p:nvSpPr>
@@ -13028,7 +13204,7 @@
       </p:sp>
       <p:sp>
         <p:nvSpPr>
-          <p:cNvPr id="18" name="TextBox 17"/>
+          <p:cNvPr id="22" name="TextBox 21"/>
           <p:cNvSpPr txBox="1"/>
           <p:nvPr/>
         </p:nvSpPr>
@@ -13075,7 +13251,7 @@
       </p:sp>
       <p:sp>
         <p:nvSpPr>
-          <p:cNvPr id="19" name="TextBox 18"/>
+          <p:cNvPr id="23" name="TextBox 22"/>
           <p:cNvSpPr txBox="1"/>
           <p:nvPr/>
         </p:nvSpPr>
@@ -13122,7 +13298,7 @@
       </p:sp>
       <p:sp>
         <p:nvSpPr>
-          <p:cNvPr id="20" name="TextBox 19"/>
+          <p:cNvPr id="24" name="TextBox 23"/>
           <p:cNvSpPr txBox="1"/>
           <p:nvPr/>
         </p:nvSpPr>
@@ -13169,14 +13345,61 @@
       </p:sp>
       <p:sp>
         <p:nvSpPr>
-          <p:cNvPr id="21" name="TextBox 20"/>
-          <p:cNvSpPr txBox="1"/>
-          <p:nvPr/>
-        </p:nvSpPr>
-        <p:spPr>
-          <a:xfrm>
-            <a:off x="609600" y="1804392"/>
-            <a:ext cx="3335655" cy="200025"/>
+          <p:cNvPr id="25" name="TextBox 24"/>
+          <p:cNvSpPr txBox="1"/>
+          <p:nvPr/>
+        </p:nvSpPr>
+        <p:spPr>
+          <a:xfrm>
+            <a:off x="609600" y="1809155"/>
+            <a:ext cx="3335655" cy="180975"/>
+          </a:xfrm>
+          <a:prstGeom prst="rect">
+            <a:avLst/>
+          </a:prstGeom>
+          <a:noFill/>
+        </p:spPr>
+        <p:txBody>
+          <a:bodyPr wrap="square" lIns="0" rIns="0" tIns="0" bIns="0" anchor="t">
+            <a:noAutofit/>
+          </a:bodyPr>
+          <a:lstStyle/>
+          <a:p>
+            <a:pPr algn="l">
+              <a:lnSpc>
+                <a:spcPts val="1425"/>
+              </a:lnSpc>
+              <a:spcBef>
+                <a:spcPts val="0"/>
+              </a:spcBef>
+              <a:spcAft>
+                <a:spcPts val="0"/>
+              </a:spcAft>
+            </a:pPr>
+            <a:r>
+              <a:rPr sz="1200" b="0" i="0" u="none">
+                <a:solidFill>
+                  <a:srgbClr val="000000"/>
+                </a:solidFill>
+                <a:latin typeface="Arial"/>
+                <a:ea typeface="Arial"/>
+                <a:cs typeface="Arial"/>
+              </a:rPr>
+              <a:t>Charité – Universitätsmedizin Berlin</a:t>
+            </a:r>
+          </a:p>
+        </p:txBody>
+      </p:sp>
+      <p:sp>
+        <p:nvSpPr>
+          <p:cNvPr id="26" name="TextBox 25"/>
+          <p:cNvSpPr txBox="1"/>
+          <p:nvPr/>
+        </p:nvSpPr>
+        <p:spPr>
+          <a:xfrm>
+            <a:off x="7258050" y="1799630"/>
+            <a:ext cx="319906" cy="200025"/>
           </a:xfrm>
           <a:prstGeom prst="rect">
             <a:avLst/>
@@ -13201,7 +13424,7 @@
               </a:spcAft>
             </a:pPr>
             <a:r>
-              <a:rPr sz="1275" b="0" i="0" u="none">
+              <a:rPr sz="1200" b="1" i="0" u="none">
                 <a:solidFill>
                   <a:srgbClr val="000000"/>
                 </a:solidFill>
@@ -13209,46 +13432,46 @@
                 <a:ea typeface="Arial"/>
                 <a:cs typeface="Arial"/>
               </a:rPr>
-              <a:t>Center for Stroke Research Berlin (Charité)</a:t>
-            </a:r>
-          </a:p>
-        </p:txBody>
-      </p:sp>
-      <p:sp>
-        <p:nvSpPr>
-          <p:cNvPr id="22" name="TextBox 21"/>
-          <p:cNvSpPr txBox="1"/>
-          <p:nvPr/>
-        </p:nvSpPr>
-        <p:spPr>
-          <a:xfrm>
-            <a:off x="7829550" y="1799630"/>
-            <a:ext cx="338733" cy="209550"/>
-          </a:xfrm>
-          <a:prstGeom prst="rect">
-            <a:avLst/>
-          </a:prstGeom>
-          <a:noFill/>
-        </p:spPr>
-        <p:txBody>
-          <a:bodyPr wrap="square" lIns="0" rIns="0" tIns="0" bIns="0" anchor="t">
-            <a:noAutofit/>
-          </a:bodyPr>
-          <a:lstStyle/>
-          <a:p>
-            <a:pPr algn="l">
-              <a:lnSpc>
-                <a:spcPts val="1650"/>
-              </a:lnSpc>
-              <a:spcBef>
-                <a:spcPts val="0"/>
-              </a:spcBef>
-              <a:spcAft>
-                <a:spcPts val="0"/>
-              </a:spcAft>
-            </a:pPr>
-            <a:r>
-              <a:rPr sz="1275" b="1" i="0" u="none">
+              <a:t>4.4×</a:t>
+            </a:r>
+          </a:p>
+        </p:txBody>
+      </p:sp>
+      <p:sp>
+        <p:nvSpPr>
+          <p:cNvPr id="27" name="TextBox 26"/>
+          <p:cNvSpPr txBox="1"/>
+          <p:nvPr/>
+        </p:nvSpPr>
+        <p:spPr>
+          <a:xfrm>
+            <a:off x="609600" y="2066330"/>
+            <a:ext cx="3335655" cy="180975"/>
+          </a:xfrm>
+          <a:prstGeom prst="rect">
+            <a:avLst/>
+          </a:prstGeom>
+          <a:noFill/>
+        </p:spPr>
+        <p:txBody>
+          <a:bodyPr wrap="square" lIns="0" rIns="0" tIns="0" bIns="0" anchor="t">
+            <a:noAutofit/>
+          </a:bodyPr>
+          <a:lstStyle/>
+          <a:p>
+            <a:pPr algn="l">
+              <a:lnSpc>
+                <a:spcPts val="1425"/>
+              </a:lnSpc>
+              <a:spcBef>
+                <a:spcPts val="0"/>
+              </a:spcBef>
+              <a:spcAft>
+                <a:spcPts val="0"/>
+              </a:spcAft>
+            </a:pPr>
+            <a:r>
+              <a:rPr sz="1200" b="0" i="0" u="none">
                 <a:solidFill>
                   <a:srgbClr val="000000"/>
                 </a:solidFill>
@@ -13256,21 +13479,21 @@
                 <a:ea typeface="Arial"/>
                 <a:cs typeface="Arial"/>
               </a:rPr>
-              <a:t>5.2×</a:t>
-            </a:r>
-          </a:p>
-        </p:txBody>
-      </p:sp>
-      <p:sp>
-        <p:nvSpPr>
-          <p:cNvPr id="23" name="TextBox 22"/>
-          <p:cNvSpPr txBox="1"/>
-          <p:nvPr/>
-        </p:nvSpPr>
-        <p:spPr>
-          <a:xfrm>
-            <a:off x="609600" y="2099667"/>
-            <a:ext cx="3335655" cy="200025"/>
+              <a:t>University of Oxford</a:t>
+            </a:r>
+          </a:p>
+        </p:txBody>
+      </p:sp>
+      <p:sp>
+        <p:nvSpPr>
+          <p:cNvPr id="28" name="TextBox 27"/>
+          <p:cNvSpPr txBox="1"/>
+          <p:nvPr/>
+        </p:nvSpPr>
+        <p:spPr>
+          <a:xfrm>
+            <a:off x="6186488" y="2056805"/>
+            <a:ext cx="319906" cy="200025"/>
           </a:xfrm>
           <a:prstGeom prst="rect">
             <a:avLst/>
@@ -13295,7 +13518,7 @@
               </a:spcAft>
             </a:pPr>
             <a:r>
-              <a:rPr sz="1275" b="0" i="0" u="none">
+              <a:rPr sz="1200" b="1" i="0" u="none">
                 <a:solidFill>
                   <a:srgbClr val="000000"/>
                 </a:solidFill>
@@ -13303,46 +13526,46 @@
                 <a:ea typeface="Arial"/>
                 <a:cs typeface="Arial"/>
               </a:rPr>
-              <a:t>Charité, Berlin</a:t>
-            </a:r>
-          </a:p>
-        </p:txBody>
-      </p:sp>
-      <p:sp>
-        <p:nvSpPr>
-          <p:cNvPr id="24" name="TextBox 23"/>
-          <p:cNvSpPr txBox="1"/>
-          <p:nvPr/>
-        </p:nvSpPr>
-        <p:spPr>
-          <a:xfrm>
-            <a:off x="7258050" y="2094905"/>
-            <a:ext cx="338733" cy="209550"/>
-          </a:xfrm>
-          <a:prstGeom prst="rect">
-            <a:avLst/>
-          </a:prstGeom>
-          <a:noFill/>
-        </p:spPr>
-        <p:txBody>
-          <a:bodyPr wrap="square" lIns="0" rIns="0" tIns="0" bIns="0" anchor="t">
-            <a:noAutofit/>
-          </a:bodyPr>
-          <a:lstStyle/>
-          <a:p>
-            <a:pPr algn="l">
-              <a:lnSpc>
-                <a:spcPts val="1650"/>
-              </a:lnSpc>
-              <a:spcBef>
-                <a:spcPts val="0"/>
-              </a:spcBef>
-              <a:spcAft>
-                <a:spcPts val="0"/>
-              </a:spcAft>
-            </a:pPr>
-            <a:r>
-              <a:rPr sz="1275" b="1" i="0" u="none">
+              <a:t>2.9×</a:t>
+            </a:r>
+          </a:p>
+        </p:txBody>
+      </p:sp>
+      <p:sp>
+        <p:nvSpPr>
+          <p:cNvPr id="29" name="TextBox 28"/>
+          <p:cNvSpPr txBox="1"/>
+          <p:nvPr/>
+        </p:nvSpPr>
+        <p:spPr>
+          <a:xfrm>
+            <a:off x="609600" y="2323505"/>
+            <a:ext cx="3335655" cy="180975"/>
+          </a:xfrm>
+          <a:prstGeom prst="rect">
+            <a:avLst/>
+          </a:prstGeom>
+          <a:noFill/>
+        </p:spPr>
+        <p:txBody>
+          <a:bodyPr wrap="square" lIns="0" rIns="0" tIns="0" bIns="0" anchor="t">
+            <a:noAutofit/>
+          </a:bodyPr>
+          <a:lstStyle/>
+          <a:p>
+            <a:pPr algn="l">
+              <a:lnSpc>
+                <a:spcPts val="1425"/>
+              </a:lnSpc>
+              <a:spcBef>
+                <a:spcPts val="0"/>
+              </a:spcBef>
+              <a:spcAft>
+                <a:spcPts val="0"/>
+              </a:spcAft>
+            </a:pPr>
+            <a:r>
+              <a:rPr sz="1200" b="0" i="0" u="none">
                 <a:solidFill>
                   <a:srgbClr val="000000"/>
                 </a:solidFill>
@@ -13350,21 +13573,21 @@
                 <a:ea typeface="Arial"/>
                 <a:cs typeface="Arial"/>
               </a:rPr>
-              <a:t>4.4×</a:t>
-            </a:r>
-          </a:p>
-        </p:txBody>
-      </p:sp>
-      <p:sp>
-        <p:nvSpPr>
-          <p:cNvPr id="25" name="TextBox 24"/>
-          <p:cNvSpPr txBox="1"/>
-          <p:nvPr/>
-        </p:nvSpPr>
-        <p:spPr>
-          <a:xfrm>
-            <a:off x="609600" y="2394942"/>
-            <a:ext cx="3335655" cy="200025"/>
+              <a:t>UKE Hamburg-Eppendorf</a:t>
+            </a:r>
+          </a:p>
+        </p:txBody>
+      </p:sp>
+      <p:sp>
+        <p:nvSpPr>
+          <p:cNvPr id="30" name="TextBox 29"/>
+          <p:cNvSpPr txBox="1"/>
+          <p:nvPr/>
+        </p:nvSpPr>
+        <p:spPr>
+          <a:xfrm>
+            <a:off x="5972175" y="2313980"/>
+            <a:ext cx="319906" cy="200025"/>
           </a:xfrm>
           <a:prstGeom prst="rect">
             <a:avLst/>
@@ -13389,7 +13612,7 @@
               </a:spcAft>
             </a:pPr>
             <a:r>
-              <a:rPr sz="1275" b="0" i="0" u="none">
+              <a:rPr sz="1200" b="1" i="0" u="none">
                 <a:solidFill>
                   <a:srgbClr val="000000"/>
                 </a:solidFill>
@@ -13397,46 +13620,46 @@
                 <a:ea typeface="Arial"/>
                 <a:cs typeface="Arial"/>
               </a:rPr>
-              <a:t>University of Oxford</a:t>
-            </a:r>
-          </a:p>
-        </p:txBody>
-      </p:sp>
-      <p:sp>
-        <p:nvSpPr>
-          <p:cNvPr id="26" name="TextBox 25"/>
-          <p:cNvSpPr txBox="1"/>
-          <p:nvPr/>
-        </p:nvSpPr>
-        <p:spPr>
-          <a:xfrm>
-            <a:off x="6186488" y="2390180"/>
-            <a:ext cx="338733" cy="209550"/>
-          </a:xfrm>
-          <a:prstGeom prst="rect">
-            <a:avLst/>
-          </a:prstGeom>
-          <a:noFill/>
-        </p:spPr>
-        <p:txBody>
-          <a:bodyPr wrap="square" lIns="0" rIns="0" tIns="0" bIns="0" anchor="t">
-            <a:noAutofit/>
-          </a:bodyPr>
-          <a:lstStyle/>
-          <a:p>
-            <a:pPr algn="l">
-              <a:lnSpc>
-                <a:spcPts val="1650"/>
-              </a:lnSpc>
-              <a:spcBef>
-                <a:spcPts val="0"/>
-              </a:spcBef>
-              <a:spcAft>
-                <a:spcPts val="0"/>
-              </a:spcAft>
-            </a:pPr>
-            <a:r>
-              <a:rPr sz="1275" b="1" i="0" u="none">
+              <a:t>2.6×</a:t>
+            </a:r>
+          </a:p>
+        </p:txBody>
+      </p:sp>
+      <p:sp>
+        <p:nvSpPr>
+          <p:cNvPr id="31" name="TextBox 30"/>
+          <p:cNvSpPr txBox="1"/>
+          <p:nvPr/>
+        </p:nvSpPr>
+        <p:spPr>
+          <a:xfrm>
+            <a:off x="609600" y="2580680"/>
+            <a:ext cx="3335655" cy="180975"/>
+          </a:xfrm>
+          <a:prstGeom prst="rect">
+            <a:avLst/>
+          </a:prstGeom>
+          <a:noFill/>
+        </p:spPr>
+        <p:txBody>
+          <a:bodyPr wrap="square" lIns="0" rIns="0" tIns="0" bIns="0" anchor="t">
+            <a:noAutofit/>
+          </a:bodyPr>
+          <a:lstStyle/>
+          <a:p>
+            <a:pPr algn="l">
+              <a:lnSpc>
+                <a:spcPts val="1425"/>
+              </a:lnSpc>
+              <a:spcBef>
+                <a:spcPts val="0"/>
+              </a:spcBef>
+              <a:spcAft>
+                <a:spcPts val="0"/>
+              </a:spcAft>
+            </a:pPr>
+            <a:r>
+              <a:rPr sz="1200" b="0" i="0" u="none">
                 <a:solidFill>
                   <a:srgbClr val="000000"/>
                 </a:solidFill>
@@ -13444,21 +13667,21 @@
                 <a:ea typeface="Arial"/>
                 <a:cs typeface="Arial"/>
               </a:rPr>
-              <a:t>2.9×</a:t>
-            </a:r>
-          </a:p>
-        </p:txBody>
-      </p:sp>
-      <p:sp>
-        <p:nvSpPr>
-          <p:cNvPr id="27" name="TextBox 26"/>
-          <p:cNvSpPr txBox="1"/>
-          <p:nvPr/>
-        </p:nvSpPr>
-        <p:spPr>
-          <a:xfrm>
-            <a:off x="609600" y="2690217"/>
-            <a:ext cx="3335655" cy="200025"/>
+              <a:t>University of Edinburgh</a:t>
+            </a:r>
+          </a:p>
+        </p:txBody>
+      </p:sp>
+      <p:sp>
+        <p:nvSpPr>
+          <p:cNvPr id="32" name="TextBox 31"/>
+          <p:cNvSpPr txBox="1"/>
+          <p:nvPr/>
+        </p:nvSpPr>
+        <p:spPr>
+          <a:xfrm>
+            <a:off x="5900738" y="2571155"/>
+            <a:ext cx="319906" cy="200025"/>
           </a:xfrm>
           <a:prstGeom prst="rect">
             <a:avLst/>
@@ -13483,7 +13706,7 @@
               </a:spcAft>
             </a:pPr>
             <a:r>
-              <a:rPr sz="1275" b="0" i="0" u="none">
+              <a:rPr sz="1200" b="1" i="0" u="none">
                 <a:solidFill>
                   <a:srgbClr val="000000"/>
                 </a:solidFill>
@@ -13491,46 +13714,46 @@
                 <a:ea typeface="Arial"/>
                 <a:cs typeface="Arial"/>
               </a:rPr>
-              <a:t>UKE Hamburg-Eppendorf</a:t>
-            </a:r>
-          </a:p>
-        </p:txBody>
-      </p:sp>
-      <p:sp>
-        <p:nvSpPr>
-          <p:cNvPr id="28" name="TextBox 27"/>
-          <p:cNvSpPr txBox="1"/>
-          <p:nvPr/>
-        </p:nvSpPr>
-        <p:spPr>
-          <a:xfrm>
-            <a:off x="5972175" y="2685455"/>
-            <a:ext cx="338733" cy="209550"/>
-          </a:xfrm>
-          <a:prstGeom prst="rect">
-            <a:avLst/>
-          </a:prstGeom>
-          <a:noFill/>
-        </p:spPr>
-        <p:txBody>
-          <a:bodyPr wrap="square" lIns="0" rIns="0" tIns="0" bIns="0" anchor="t">
-            <a:noAutofit/>
-          </a:bodyPr>
-          <a:lstStyle/>
-          <a:p>
-            <a:pPr algn="l">
-              <a:lnSpc>
-                <a:spcPts val="1650"/>
-              </a:lnSpc>
-              <a:spcBef>
-                <a:spcPts val="0"/>
-              </a:spcBef>
-              <a:spcAft>
-                <a:spcPts val="0"/>
-              </a:spcAft>
-            </a:pPr>
-            <a:r>
-              <a:rPr sz="1275" b="1" i="0" u="none">
+              <a:t>2.5×</a:t>
+            </a:r>
+          </a:p>
+        </p:txBody>
+      </p:sp>
+      <p:sp>
+        <p:nvSpPr>
+          <p:cNvPr id="33" name="TextBox 32"/>
+          <p:cNvSpPr txBox="1"/>
+          <p:nvPr/>
+        </p:nvSpPr>
+        <p:spPr>
+          <a:xfrm>
+            <a:off x="609600" y="2837855"/>
+            <a:ext cx="3335655" cy="180975"/>
+          </a:xfrm>
+          <a:prstGeom prst="rect">
+            <a:avLst/>
+          </a:prstGeom>
+          <a:noFill/>
+        </p:spPr>
+        <p:txBody>
+          <a:bodyPr wrap="square" lIns="0" rIns="0" tIns="0" bIns="0" anchor="t">
+            <a:noAutofit/>
+          </a:bodyPr>
+          <a:lstStyle/>
+          <a:p>
+            <a:pPr algn="l">
+              <a:lnSpc>
+                <a:spcPts val="1425"/>
+              </a:lnSpc>
+              <a:spcBef>
+                <a:spcPts val="0"/>
+              </a:spcBef>
+              <a:spcAft>
+                <a:spcPts val="0"/>
+              </a:spcAft>
+            </a:pPr>
+            <a:r>
+              <a:rPr sz="1200" b="0" i="0" u="none">
                 <a:solidFill>
                   <a:srgbClr val="000000"/>
                 </a:solidFill>
@@ -13538,21 +13761,21 @@
                 <a:ea typeface="Arial"/>
                 <a:cs typeface="Arial"/>
               </a:rPr>
-              <a:t>2.6×</a:t>
-            </a:r>
-          </a:p>
-        </p:txBody>
-      </p:sp>
-      <p:sp>
-        <p:nvSpPr>
-          <p:cNvPr id="29" name="TextBox 28"/>
-          <p:cNvSpPr txBox="1"/>
-          <p:nvPr/>
-        </p:nvSpPr>
-        <p:spPr>
-          <a:xfrm>
-            <a:off x="609600" y="2985492"/>
-            <a:ext cx="3335655" cy="200025"/>
+              <a:t>Stanford University</a:t>
+            </a:r>
+          </a:p>
+        </p:txBody>
+      </p:sp>
+      <p:sp>
+        <p:nvSpPr>
+          <p:cNvPr id="34" name="TextBox 33"/>
+          <p:cNvSpPr txBox="1"/>
+          <p:nvPr/>
+        </p:nvSpPr>
+        <p:spPr>
+          <a:xfrm>
+            <a:off x="5757862" y="2828330"/>
+            <a:ext cx="319906" cy="200025"/>
           </a:xfrm>
           <a:prstGeom prst="rect">
             <a:avLst/>
@@ -13577,7 +13800,7 @@
               </a:spcAft>
             </a:pPr>
             <a:r>
-              <a:rPr sz="1275" b="0" i="0" u="none">
+              <a:rPr sz="1200" b="1" i="0" u="none">
                 <a:solidFill>
                   <a:srgbClr val="000000"/>
                 </a:solidFill>
@@ -13585,46 +13808,46 @@
                 <a:ea typeface="Arial"/>
                 <a:cs typeface="Arial"/>
               </a:rPr>
-              <a:t>University of Edinburgh</a:t>
-            </a:r>
-          </a:p>
-        </p:txBody>
-      </p:sp>
-      <p:sp>
-        <p:nvSpPr>
-          <p:cNvPr id="30" name="TextBox 29"/>
-          <p:cNvSpPr txBox="1"/>
-          <p:nvPr/>
-        </p:nvSpPr>
-        <p:spPr>
-          <a:xfrm>
-            <a:off x="5900738" y="2980730"/>
-            <a:ext cx="338733" cy="209550"/>
-          </a:xfrm>
-          <a:prstGeom prst="rect">
-            <a:avLst/>
-          </a:prstGeom>
-          <a:noFill/>
-        </p:spPr>
-        <p:txBody>
-          <a:bodyPr wrap="square" lIns="0" rIns="0" tIns="0" bIns="0" anchor="t">
-            <a:noAutofit/>
-          </a:bodyPr>
-          <a:lstStyle/>
-          <a:p>
-            <a:pPr algn="l">
-              <a:lnSpc>
-                <a:spcPts val="1650"/>
-              </a:lnSpc>
-              <a:spcBef>
-                <a:spcPts val="0"/>
-              </a:spcBef>
-              <a:spcAft>
-                <a:spcPts val="0"/>
-              </a:spcAft>
-            </a:pPr>
-            <a:r>
-              <a:rPr sz="1275" b="1" i="0" u="none">
+              <a:t>2.3×</a:t>
+            </a:r>
+          </a:p>
+        </p:txBody>
+      </p:sp>
+      <p:sp>
+        <p:nvSpPr>
+          <p:cNvPr id="35" name="TextBox 34"/>
+          <p:cNvSpPr txBox="1"/>
+          <p:nvPr/>
+        </p:nvSpPr>
+        <p:spPr>
+          <a:xfrm>
+            <a:off x="609600" y="3095030"/>
+            <a:ext cx="3335655" cy="180975"/>
+          </a:xfrm>
+          <a:prstGeom prst="rect">
+            <a:avLst/>
+          </a:prstGeom>
+          <a:noFill/>
+        </p:spPr>
+        <p:txBody>
+          <a:bodyPr wrap="square" lIns="0" rIns="0" tIns="0" bIns="0" anchor="t">
+            <a:noAutofit/>
+          </a:bodyPr>
+          <a:lstStyle/>
+          <a:p>
+            <a:pPr algn="l">
+              <a:lnSpc>
+                <a:spcPts val="1425"/>
+              </a:lnSpc>
+              <a:spcBef>
+                <a:spcPts val="0"/>
+              </a:spcBef>
+              <a:spcAft>
+                <a:spcPts val="0"/>
+              </a:spcAft>
+            </a:pPr>
+            <a:r>
+              <a:rPr sz="1200" b="0" i="0" u="none">
                 <a:solidFill>
                   <a:srgbClr val="000000"/>
                 </a:solidFill>
@@ -13632,21 +13855,21 @@
                 <a:ea typeface="Arial"/>
                 <a:cs typeface="Arial"/>
               </a:rPr>
-              <a:t>2.5×</a:t>
-            </a:r>
-          </a:p>
-        </p:txBody>
-      </p:sp>
-      <p:sp>
-        <p:nvSpPr>
-          <p:cNvPr id="31" name="TextBox 30"/>
-          <p:cNvSpPr txBox="1"/>
-          <p:nvPr/>
-        </p:nvSpPr>
-        <p:spPr>
-          <a:xfrm>
-            <a:off x="609600" y="3280767"/>
-            <a:ext cx="3335655" cy="200025"/>
+              <a:t>University of Nottingham</a:t>
+            </a:r>
+          </a:p>
+        </p:txBody>
+      </p:sp>
+      <p:sp>
+        <p:nvSpPr>
+          <p:cNvPr id="36" name="TextBox 35"/>
+          <p:cNvSpPr txBox="1"/>
+          <p:nvPr/>
+        </p:nvSpPr>
+        <p:spPr>
+          <a:xfrm>
+            <a:off x="5686425" y="3085505"/>
+            <a:ext cx="319906" cy="200025"/>
           </a:xfrm>
           <a:prstGeom prst="rect">
             <a:avLst/>
@@ -13671,7 +13894,7 @@
               </a:spcAft>
             </a:pPr>
             <a:r>
-              <a:rPr sz="1275" b="0" i="0" u="none">
+              <a:rPr sz="1200" b="1" i="0" u="none">
                 <a:solidFill>
                   <a:srgbClr val="000000"/>
                 </a:solidFill>
@@ -13679,46 +13902,46 @@
                 <a:ea typeface="Arial"/>
                 <a:cs typeface="Arial"/>
               </a:rPr>
-              <a:t>Stanford University</a:t>
-            </a:r>
-          </a:p>
-        </p:txBody>
-      </p:sp>
-      <p:sp>
-        <p:nvSpPr>
-          <p:cNvPr id="32" name="TextBox 31"/>
-          <p:cNvSpPr txBox="1"/>
-          <p:nvPr/>
-        </p:nvSpPr>
-        <p:spPr>
-          <a:xfrm>
-            <a:off x="5757862" y="3276005"/>
-            <a:ext cx="338733" cy="209550"/>
-          </a:xfrm>
-          <a:prstGeom prst="rect">
-            <a:avLst/>
-          </a:prstGeom>
-          <a:noFill/>
-        </p:spPr>
-        <p:txBody>
-          <a:bodyPr wrap="square" lIns="0" rIns="0" tIns="0" bIns="0" anchor="t">
-            <a:noAutofit/>
-          </a:bodyPr>
-          <a:lstStyle/>
-          <a:p>
-            <a:pPr algn="l">
-              <a:lnSpc>
-                <a:spcPts val="1650"/>
-              </a:lnSpc>
-              <a:spcBef>
-                <a:spcPts val="0"/>
-              </a:spcBef>
-              <a:spcAft>
-                <a:spcPts val="0"/>
-              </a:spcAft>
-            </a:pPr>
-            <a:r>
-              <a:rPr sz="1275" b="1" i="0" u="none">
+              <a:t>2.2×</a:t>
+            </a:r>
+          </a:p>
+        </p:txBody>
+      </p:sp>
+      <p:sp>
+        <p:nvSpPr>
+          <p:cNvPr id="37" name="TextBox 36"/>
+          <p:cNvSpPr txBox="1"/>
+          <p:nvPr/>
+        </p:nvSpPr>
+        <p:spPr>
+          <a:xfrm>
+            <a:off x="609600" y="3352205"/>
+            <a:ext cx="3335655" cy="180975"/>
+          </a:xfrm>
+          <a:prstGeom prst="rect">
+            <a:avLst/>
+          </a:prstGeom>
+          <a:noFill/>
+        </p:spPr>
+        <p:txBody>
+          <a:bodyPr wrap="square" lIns="0" rIns="0" tIns="0" bIns="0" anchor="t">
+            <a:noAutofit/>
+          </a:bodyPr>
+          <a:lstStyle/>
+          <a:p>
+            <a:pPr algn="l">
+              <a:lnSpc>
+                <a:spcPts val="1425"/>
+              </a:lnSpc>
+              <a:spcBef>
+                <a:spcPts val="0"/>
+              </a:spcBef>
+              <a:spcAft>
+                <a:spcPts val="0"/>
+              </a:spcAft>
+            </a:pPr>
+            <a:r>
+              <a:rPr sz="1200" b="0" i="0" u="none">
                 <a:solidFill>
                   <a:srgbClr val="000000"/>
                 </a:solidFill>
@@ -13726,20 +13949,161 @@
                 <a:ea typeface="Arial"/>
                 <a:cs typeface="Arial"/>
               </a:rPr>
-              <a:t>2.3×</a:t>
-            </a:r>
-          </a:p>
-        </p:txBody>
-      </p:sp>
-      <p:sp>
-        <p:nvSpPr>
-          <p:cNvPr id="33" name="TextBox 32"/>
-          <p:cNvSpPr txBox="1"/>
-          <p:nvPr/>
-        </p:nvSpPr>
-        <p:spPr>
-          <a:xfrm>
-            <a:off x="609600" y="3637955"/>
+              <a:t>Massachusetts General Hospital</a:t>
+            </a:r>
+          </a:p>
+        </p:txBody>
+      </p:sp>
+      <p:sp>
+        <p:nvSpPr>
+          <p:cNvPr id="38" name="TextBox 37"/>
+          <p:cNvSpPr txBox="1"/>
+          <p:nvPr/>
+        </p:nvSpPr>
+        <p:spPr>
+          <a:xfrm>
+            <a:off x="5686425" y="3342680"/>
+            <a:ext cx="319906" cy="200025"/>
+          </a:xfrm>
+          <a:prstGeom prst="rect">
+            <a:avLst/>
+          </a:prstGeom>
+          <a:noFill/>
+        </p:spPr>
+        <p:txBody>
+          <a:bodyPr wrap="square" lIns="0" rIns="0" tIns="0" bIns="0" anchor="t">
+            <a:noAutofit/>
+          </a:bodyPr>
+          <a:lstStyle/>
+          <a:p>
+            <a:pPr algn="l">
+              <a:lnSpc>
+                <a:spcPts val="1575"/>
+              </a:lnSpc>
+              <a:spcBef>
+                <a:spcPts val="0"/>
+              </a:spcBef>
+              <a:spcAft>
+                <a:spcPts val="0"/>
+              </a:spcAft>
+            </a:pPr>
+            <a:r>
+              <a:rPr sz="1200" b="1" i="0" u="none">
+                <a:solidFill>
+                  <a:srgbClr val="000000"/>
+                </a:solidFill>
+                <a:latin typeface="Arial"/>
+                <a:ea typeface="Arial"/>
+                <a:cs typeface="Arial"/>
+              </a:rPr>
+              <a:t>2.2×</a:t>
+            </a:r>
+          </a:p>
+        </p:txBody>
+      </p:sp>
+      <p:sp>
+        <p:nvSpPr>
+          <p:cNvPr id="39" name="TextBox 38"/>
+          <p:cNvSpPr txBox="1"/>
+          <p:nvPr/>
+        </p:nvSpPr>
+        <p:spPr>
+          <a:xfrm>
+            <a:off x="609600" y="3609380"/>
+            <a:ext cx="3335655" cy="180975"/>
+          </a:xfrm>
+          <a:prstGeom prst="rect">
+            <a:avLst/>
+          </a:prstGeom>
+          <a:noFill/>
+        </p:spPr>
+        <p:txBody>
+          <a:bodyPr wrap="square" lIns="0" rIns="0" tIns="0" bIns="0" anchor="t">
+            <a:noAutofit/>
+          </a:bodyPr>
+          <a:lstStyle/>
+          <a:p>
+            <a:pPr algn="l">
+              <a:lnSpc>
+                <a:spcPts val="1425"/>
+              </a:lnSpc>
+              <a:spcBef>
+                <a:spcPts val="0"/>
+              </a:spcBef>
+              <a:spcAft>
+                <a:spcPts val="0"/>
+              </a:spcAft>
+            </a:pPr>
+            <a:r>
+              <a:rPr sz="1200" b="0" i="0" u="none">
+                <a:solidFill>
+                  <a:srgbClr val="000000"/>
+                </a:solidFill>
+                <a:latin typeface="Arial"/>
+                <a:ea typeface="Arial"/>
+                <a:cs typeface="Arial"/>
+              </a:rPr>
+              <a:t>University of Glasgow</a:t>
+            </a:r>
+          </a:p>
+        </p:txBody>
+      </p:sp>
+      <p:sp>
+        <p:nvSpPr>
+          <p:cNvPr id="40" name="TextBox 39"/>
+          <p:cNvSpPr txBox="1"/>
+          <p:nvPr/>
+        </p:nvSpPr>
+        <p:spPr>
+          <a:xfrm>
+            <a:off x="5614988" y="3599855"/>
+            <a:ext cx="319906" cy="200025"/>
+          </a:xfrm>
+          <a:prstGeom prst="rect">
+            <a:avLst/>
+          </a:prstGeom>
+          <a:noFill/>
+        </p:spPr>
+        <p:txBody>
+          <a:bodyPr wrap="square" lIns="0" rIns="0" tIns="0" bIns="0" anchor="t">
+            <a:noAutofit/>
+          </a:bodyPr>
+          <a:lstStyle/>
+          <a:p>
+            <a:pPr algn="l">
+              <a:lnSpc>
+                <a:spcPts val="1575"/>
+              </a:lnSpc>
+              <a:spcBef>
+                <a:spcPts val="0"/>
+              </a:spcBef>
+              <a:spcAft>
+                <a:spcPts val="0"/>
+              </a:spcAft>
+            </a:pPr>
+            <a:r>
+              <a:rPr sz="1200" b="1" i="0" u="none">
+                <a:solidFill>
+                  <a:srgbClr val="000000"/>
+                </a:solidFill>
+                <a:latin typeface="Arial"/>
+                <a:ea typeface="Arial"/>
+                <a:cs typeface="Arial"/>
+              </a:rPr>
+              <a:t>2.1×</a:t>
+            </a:r>
+          </a:p>
+        </p:txBody>
+      </p:sp>
+      <p:sp>
+        <p:nvSpPr>
+          <p:cNvPr id="41" name="TextBox 40"/>
+          <p:cNvSpPr txBox="1"/>
+          <p:nvPr/>
+        </p:nvSpPr>
+        <p:spPr>
+          <a:xfrm>
+            <a:off x="609600" y="3952280"/>
             <a:ext cx="8162544" cy="185738"/>
           </a:xfrm>
           <a:prstGeom prst="rect">
